--- a/VOIS_Major_Project_Vedika Pande.pptx
+++ b/VOIS_Major_Project_Vedika Pande.pptx
@@ -948,7 +948,7 @@
           <a:p>
             <a:fld id="{EF1077DB-935E-4A0A-947A-D283B9F9F452}" type="datetimeFigureOut">
               <a:rPr lang="en-US" smtClean="0"/>
-              <a:t>9/8/2026</a:t>
+              <a:t>9/17/2026</a:t>
             </a:fld>
             <a:endParaRPr lang="en-US" dirty="0"/>
           </a:p>
@@ -1125,7 +1125,7 @@
           <a:p>
             <a:fld id="{2D9EC30E-1A71-4188-9BE7-E2A64929A436}" type="datetimeFigureOut">
               <a:rPr lang="en-US" noProof="0" smtClean="0"/>
-              <a:t>9/8/2026</a:t>
+              <a:t>9/17/2026</a:t>
             </a:fld>
             <a:endParaRPr lang="en-US" noProof="0" dirty="0"/>
           </a:p>
@@ -2222,7 +2222,7 @@
             <a:fld id="{B61BEF0D-F0BB-DE4B-95CE-6DB70DBA9567}" type="datetimeFigureOut">
               <a:rPr lang="en-US" smtClean="0"/>
               <a:pPr/>
-              <a:t>9/8/2026</a:t>
+              <a:t>9/17/2026</a:t>
             </a:fld>
             <a:endParaRPr lang="en-US" dirty="0"/>
           </a:p>
@@ -2476,7 +2476,7 @@
             <a:fld id="{B61BEF0D-F0BB-DE4B-95CE-6DB70DBA9567}" type="datetimeFigureOut">
               <a:rPr lang="en-US" smtClean="0"/>
               <a:pPr/>
-              <a:t>9/8/2026</a:t>
+              <a:t>9/17/2026</a:t>
             </a:fld>
             <a:endParaRPr lang="en-US" dirty="0"/>
           </a:p>
@@ -2793,7 +2793,7 @@
             <a:fld id="{B61BEF0D-F0BB-DE4B-95CE-6DB70DBA9567}" type="datetimeFigureOut">
               <a:rPr lang="en-US" smtClean="0"/>
               <a:pPr/>
-              <a:t>9/8/2026</a:t>
+              <a:t>9/17/2026</a:t>
             </a:fld>
             <a:endParaRPr lang="en-US" dirty="0"/>
           </a:p>
@@ -3129,7 +3129,7 @@
             <a:fld id="{B61BEF0D-F0BB-DE4B-95CE-6DB70DBA9567}" type="datetimeFigureOut">
               <a:rPr lang="en-US" smtClean="0"/>
               <a:pPr/>
-              <a:t>9/8/2026</a:t>
+              <a:t>9/17/2026</a:t>
             </a:fld>
             <a:endParaRPr lang="en-US" dirty="0"/>
           </a:p>
@@ -3446,7 +3446,7 @@
             <a:fld id="{B61BEF0D-F0BB-DE4B-95CE-6DB70DBA9567}" type="datetimeFigureOut">
               <a:rPr lang="en-US" smtClean="0"/>
               <a:pPr/>
-              <a:t>9/8/2026</a:t>
+              <a:t>9/17/2026</a:t>
             </a:fld>
             <a:endParaRPr lang="en-US" dirty="0"/>
           </a:p>
@@ -3842,7 +3842,7 @@
             <a:fld id="{B61BEF0D-F0BB-DE4B-95CE-6DB70DBA9567}" type="datetimeFigureOut">
               <a:rPr lang="en-US" smtClean="0"/>
               <a:pPr/>
-              <a:t>9/8/2026</a:t>
+              <a:t>9/17/2026</a:t>
             </a:fld>
             <a:endParaRPr lang="en-US" dirty="0"/>
           </a:p>
@@ -4014,7 +4014,7 @@
           <a:p>
             <a:fld id="{55C6B4A9-1611-4792-9094-5F34BCA07E0B}" type="datetimeFigureOut">
               <a:rPr lang="en-US" smtClean="0"/>
-              <a:t>9/8/2026</a:t>
+              <a:t>9/17/2026</a:t>
             </a:fld>
             <a:endParaRPr lang="en-US" dirty="0"/>
           </a:p>
@@ -4196,7 +4196,7 @@
             <a:fld id="{B61BEF0D-F0BB-DE4B-95CE-6DB70DBA9567}" type="datetimeFigureOut">
               <a:rPr lang="en-US" smtClean="0"/>
               <a:pPr/>
-              <a:t>9/8/2026</a:t>
+              <a:t>9/17/2026</a:t>
             </a:fld>
             <a:endParaRPr lang="en-US" dirty="0"/>
           </a:p>
@@ -5925,7 +5925,7 @@
             <a:fld id="{B61BEF0D-F0BB-DE4B-95CE-6DB70DBA9567}" type="datetimeFigureOut">
               <a:rPr lang="en-US" smtClean="0"/>
               <a:pPr/>
-              <a:t>9/8/2026</a:t>
+              <a:t>9/17/2026</a:t>
             </a:fld>
             <a:endParaRPr lang="en-US" dirty="0"/>
           </a:p>
@@ -7660,7 +7660,7 @@
             <a:fld id="{B61BEF0D-F0BB-DE4B-95CE-6DB70DBA9567}" type="datetimeFigureOut">
               <a:rPr lang="en-US" smtClean="0"/>
               <a:pPr/>
-              <a:t>9/8/2026</a:t>
+              <a:t>9/17/2026</a:t>
             </a:fld>
             <a:endParaRPr lang="en-US" dirty="0"/>
           </a:p>
@@ -7894,7 +7894,7 @@
           <a:p>
             <a:fld id="{EB712588-04B1-427B-82EE-E8DB90309F08}" type="datetimeFigureOut">
               <a:rPr lang="en-US" smtClean="0"/>
-              <a:t>9/8/2026</a:t>
+              <a:t>9/17/2026</a:t>
             </a:fld>
             <a:endParaRPr lang="en-US" dirty="0"/>
           </a:p>
@@ -8270,7 +8270,7 @@
             <a:fld id="{B61BEF0D-F0BB-DE4B-95CE-6DB70DBA9567}" type="datetimeFigureOut">
               <a:rPr lang="en-US" smtClean="0"/>
               <a:pPr/>
-              <a:t>9/8/2026</a:t>
+              <a:t>9/17/2026</a:t>
             </a:fld>
             <a:endParaRPr lang="en-US" dirty="0"/>
           </a:p>
@@ -8396,7 +8396,7 @@
             <a:fld id="{B61BEF0D-F0BB-DE4B-95CE-6DB70DBA9567}" type="datetimeFigureOut">
               <a:rPr lang="en-US" smtClean="0"/>
               <a:pPr/>
-              <a:t>9/8/2026</a:t>
+              <a:t>9/17/2026</a:t>
             </a:fld>
             <a:endParaRPr lang="en-US" dirty="0"/>
           </a:p>
@@ -8494,7 +8494,7 @@
             <a:fld id="{B61BEF0D-F0BB-DE4B-95CE-6DB70DBA9567}" type="datetimeFigureOut">
               <a:rPr lang="en-US" smtClean="0"/>
               <a:pPr/>
-              <a:t>9/8/2026</a:t>
+              <a:t>9/17/2026</a:t>
             </a:fld>
             <a:endParaRPr lang="en-US" dirty="0"/>
           </a:p>
@@ -8751,7 +8751,7 @@
           <a:p>
             <a:fld id="{42A54C80-263E-416B-A8E0-580EDEADCBDC}" type="datetimeFigureOut">
               <a:rPr lang="en-US" smtClean="0"/>
-              <a:t>9/8/2026</a:t>
+              <a:t>9/17/2026</a:t>
             </a:fld>
             <a:endParaRPr lang="en-US" dirty="0"/>
           </a:p>
@@ -9059,7 +9059,7 @@
             <a:fld id="{B61BEF0D-F0BB-DE4B-95CE-6DB70DBA9567}" type="datetimeFigureOut">
               <a:rPr lang="en-US" smtClean="0"/>
               <a:pPr/>
-              <a:t>9/8/2026</a:t>
+              <a:t>9/17/2026</a:t>
             </a:fld>
             <a:endParaRPr lang="en-US" dirty="0"/>
           </a:p>
@@ -9763,7 +9763,7 @@
             <a:fld id="{B61BEF0D-F0BB-DE4B-95CE-6DB70DBA9567}" type="datetimeFigureOut">
               <a:rPr lang="en-US" smtClean="0"/>
               <a:pPr/>
-              <a:t>9/8/2026</a:t>
+              <a:t>9/17/2026</a:t>
             </a:fld>
             <a:endParaRPr lang="en-US" dirty="0"/>
           </a:p>
@@ -9974,7 +9974,7 @@
                 </a:solidFill>
               </a:rPr>
               <a:pPr/>
-              <a:t>9/8/2026</a:t>
+              <a:t>9/17/2026</a:t>
             </a:fld>
             <a:endParaRPr lang="en-US" sz="1100" dirty="0">
               <a:solidFill>
@@ -17118,7 +17118,7 @@
         </p:nvSpPr>
         <p:spPr>
           <a:xfrm>
-            <a:off x="729256" y="1440320"/>
+            <a:off x="729256" y="2167683"/>
             <a:ext cx="7232875" cy="646331"/>
           </a:xfrm>
           <a:prstGeom prst="rect">
@@ -17134,7 +17134,7 @@
           <a:p>
             <a:r>
               <a:rPr lang="en-US" dirty="0"/>
-              <a:t>https://github.com/AswiniKumar55/-Seasonal-Agriculture-Performance-Analysis-.git</a:t>
+              <a:t>https://github.com/vedikapande44-spec/Seasonal-Agricultural-Performance-Analysis</a:t>
             </a:r>
           </a:p>
         </p:txBody>
@@ -27960,21 +27960,21 @@
 </file>
 
 <file path=customXml/item2.xml><?xml version="1.0" encoding="utf-8"?>
+<?mso-contentType ?>
+<FormTemplates xmlns="http://schemas.microsoft.com/sharepoint/v3/contenttype/forms">
+  <Display>DocumentLibraryForm</Display>
+  <Edit>DocumentLibraryForm</Edit>
+  <New>DocumentLibraryForm</New>
+</FormTemplates>
+</file>
+
+<file path=customXml/item3.xml><?xml version="1.0" encoding="utf-8"?>
 <p:properties xmlns:p="http://schemas.microsoft.com/office/2006/metadata/properties" xmlns:xsi="http://www.w3.org/2001/XMLSchema-instance" xmlns:pc="http://schemas.microsoft.com/office/infopath/2007/PartnerControls">
   <documentManagement>
     <Status xmlns="71af3243-3dd4-4a8d-8c0d-dd76da1f02a5">Not started</Status>
     <MediaServiceKeyPoints xmlns="71af3243-3dd4-4a8d-8c0d-dd76da1f02a5" xsi:nil="true"/>
   </documentManagement>
 </p:properties>
-</file>
-
-<file path=customXml/item3.xml><?xml version="1.0" encoding="utf-8"?>
-<?mso-contentType ?>
-<FormTemplates xmlns="http://schemas.microsoft.com/sharepoint/v3/contenttype/forms">
-  <Display>DocumentLibraryForm</Display>
-  <Edit>DocumentLibraryForm</Edit>
-  <New>DocumentLibraryForm</New>
-</FormTemplates>
 </file>
 
 <file path=customXml/itemProps1.xml><?xml version="1.0" encoding="utf-8"?>
@@ -27997,6 +27997,14 @@
 </file>
 
 <file path=customXml/itemProps2.xml><?xml version="1.0" encoding="utf-8"?>
+<ds:datastoreItem xmlns:ds="http://schemas.openxmlformats.org/officeDocument/2006/customXml" ds:itemID="{05D99ABA-76CE-4A8E-B5F0-C051B96628DE}">
+  <ds:schemaRefs>
+    <ds:schemaRef ds:uri="http://schemas.microsoft.com/sharepoint/v3/contenttype/forms"/>
+  </ds:schemaRefs>
+</ds:datastoreItem>
+</file>
+
+<file path=customXml/itemProps3.xml><?xml version="1.0" encoding="utf-8"?>
 <ds:datastoreItem xmlns:ds="http://schemas.openxmlformats.org/officeDocument/2006/customXml" ds:itemID="{4DEA9014-ED64-4558-B1E1-D03F0EE32BEB}">
   <ds:schemaRefs>
     <ds:schemaRef ds:uri="http://schemas.microsoft.com/office/2006/metadata/properties"/>
@@ -28004,12 +28012,4 @@
     <ds:schemaRef ds:uri="71af3243-3dd4-4a8d-8c0d-dd76da1f02a5"/>
   </ds:schemaRefs>
 </ds:datastoreItem>
-</file>
-
-<file path=customXml/itemProps3.xml><?xml version="1.0" encoding="utf-8"?>
-<ds:datastoreItem xmlns:ds="http://schemas.openxmlformats.org/officeDocument/2006/customXml" ds:itemID="{05D99ABA-76CE-4A8E-B5F0-C051B96628DE}">
-  <ds:schemaRefs>
-    <ds:schemaRef ds:uri="http://schemas.microsoft.com/sharepoint/v3/contenttype/forms"/>
-  </ds:schemaRefs>
-</ds:datastoreItem>
 </file>